--- a/docs/더스티치 OSMU 사용자 매뉴얼.pptx
+++ b/docs/더스티치 OSMU 사용자 매뉴얼.pptx
@@ -2507,6 +2507,10 @@
             <a:prstDash val="solid"/>
           </a:ln>
         </p:spPr>
+        <p:txBody>
+          <a:bodyPr/>
+          <a:p/>
+        </p:txBody>
       </p:sp>
       <p:sp>
         <p:nvSpPr>
@@ -2622,6 +2626,10 @@
             <a:prstDash val="solid"/>
           </a:ln>
         </p:spPr>
+        <p:txBody>
+          <a:bodyPr/>
+          <a:p/>
+        </p:txBody>
       </p:sp>
       <p:sp>
         <p:nvSpPr>
@@ -2737,6 +2745,10 @@
             <a:prstDash val="solid"/>
           </a:ln>
         </p:spPr>
+        <p:txBody>
+          <a:bodyPr/>
+          <a:p/>
+        </p:txBody>
       </p:sp>
       <p:sp>
         <p:nvSpPr>
@@ -2852,6 +2864,10 @@
             <a:prstDash val="solid"/>
           </a:ln>
         </p:spPr>
+        <p:txBody>
+          <a:bodyPr/>
+          <a:p/>
+        </p:txBody>
       </p:sp>
       <p:sp>
         <p:nvSpPr>
@@ -2935,7 +2951,7 @@
                 <a:ea typeface="IBM Plex Sans KR" pitchFamily="34" charset="-122"/>
                 <a:cs typeface="IBM Plex Sans KR" pitchFamily="34" charset="-120"/>
               </a:rPr>
-              <a:t>키워드 갱신 마법사의 결과. 전환 가중치·검색 타깃 여부를 표에서 직접 조정 가능</a:t>
+              <a:t>SEO 키워드 새로 고르기의 결과. 전환 가중치·검색 타깃 여부를 표에서 직접 조정 가능</a:t>
             </a:r>
             <a:endParaRPr lang="en-US" sz="1000" dirty="0"/>
           </a:p>
@@ -2967,6 +2983,10 @@
             <a:prstDash val="solid"/>
           </a:ln>
         </p:spPr>
+        <p:txBody>
+          <a:bodyPr/>
+          <a:p/>
+        </p:txBody>
       </p:sp>
       <p:sp>
         <p:nvSpPr>
@@ -3082,6 +3102,10 @@
             <a:prstDash val="solid"/>
           </a:ln>
         </p:spPr>
+        <p:txBody>
+          <a:bodyPr/>
+          <a:p/>
+        </p:txBody>
       </p:sp>
       <p:sp>
         <p:nvSpPr>
@@ -3197,6 +3221,10 @@
             <a:prstDash val="solid"/>
           </a:ln>
         </p:spPr>
+        <p:txBody>
+          <a:bodyPr/>
+          <a:p/>
+        </p:txBody>
       </p:sp>
       <p:sp>
         <p:nvSpPr>
@@ -3236,7 +3264,7 @@
                 <a:ea typeface="IBM Plex Sans KR" pitchFamily="34" charset="-122"/>
                 <a:cs typeface="IBM Plex Sans KR" pitchFamily="34" charset="-120"/>
               </a:rPr>
-              <a:t>SEO 키워드 경쟁도 측정이 만료되면 전환 가중치가 조용히 꺼집니다 — 만료 경고가 보이면 05단계 키워드 갱신을 다시 실행하세요.</a:t>
+              <a:t>SEO 키워드 경쟁도 측정이 만료되면 전환 가중치가 조용히 꺼집니다 — 만료 경고가 보이면 설정의 🔄 키워드 수치 유지 [숫자만 새로 재기]를 누르세요.</a:t>
             </a:r>
             <a:endParaRPr lang="en-US" sz="1100" dirty="0"/>
           </a:p>
@@ -6876,7 +6904,7 @@
                 <a:ea typeface="IBM Plex Sans KR" pitchFamily="34" charset="-122"/>
                 <a:cs typeface="IBM Plex Sans KR" pitchFamily="34" charset="-120"/>
               </a:rPr>
-              <a:t>키워드 갱신 마법사 1~4단계 실행</a:t>
+              <a:t>SEO 키워드 새로 고르기 1~4단계 실행</a:t>
             </a:r>
             <a:endParaRPr lang="en-US" sz="1300" dirty="0"/>
           </a:p>
@@ -6903,6 +6931,10 @@
           </a:solidFill>
           <a:ln/>
         </p:spPr>
+        <p:txBody>
+          <a:bodyPr/>
+          <a:p/>
+        </p:txBody>
       </p:sp>
       <p:sp>
         <p:nvSpPr>
@@ -7854,7 +7886,7 @@
                 <a:ea typeface="IBM Plex Sans KR" pitchFamily="34" charset="-122"/>
                 <a:cs typeface="IBM Plex Sans KR" pitchFamily="34" charset="-120"/>
               </a:rPr>
-              <a:t>키워드 갱신 마법사 (1~4단계)</a:t>
+              <a:t>SEO 키워드 새로 고르기 (1~4단계)</a:t>
             </a:r>
             <a:endParaRPr lang="en-US" sz="1300" dirty="0"/>
           </a:p>
@@ -9080,6 +9112,10 @@
             <a:prstDash val="solid"/>
           </a:ln>
         </p:spPr>
+        <p:txBody>
+          <a:bodyPr/>
+          <a:p/>
+        </p:txBody>
       </p:sp>
       <p:sp>
         <p:nvSpPr>
@@ -9218,6 +9254,10 @@
             <a:prstDash val="solid"/>
           </a:ln>
         </p:spPr>
+        <p:txBody>
+          <a:bodyPr/>
+          <a:p/>
+        </p:txBody>
       </p:sp>
       <p:sp>
         <p:nvSpPr>
@@ -9356,6 +9396,10 @@
             <a:prstDash val="solid"/>
           </a:ln>
         </p:spPr>
+        <p:txBody>
+          <a:bodyPr/>
+          <a:p/>
+        </p:txBody>
       </p:sp>
       <p:sp>
         <p:nvSpPr>
@@ -9494,6 +9538,10 @@
             <a:prstDash val="solid"/>
           </a:ln>
         </p:spPr>
+        <p:txBody>
+          <a:bodyPr/>
+          <a:p/>
+        </p:txBody>
       </p:sp>
       <p:sp>
         <p:nvSpPr>
@@ -9577,7 +9625,7 @@
                 <a:ea typeface="IBM Plex Sans KR" pitchFamily="34" charset="-122"/>
                 <a:cs typeface="IBM Plex Sans KR" pitchFamily="34" charset="-120"/>
               </a:rPr>
-              <a:t>키워드 갱신 (1~4단계)</a:t>
+              <a:t>SEO 키워드 새로 고르기 (1~4단계)</a:t>
             </a:r>
             <a:endParaRPr lang="en-US" sz="1150" dirty="0"/>
           </a:p>
@@ -9632,6 +9680,10 @@
             <a:prstDash val="solid"/>
           </a:ln>
         </p:spPr>
+        <p:txBody>
+          <a:bodyPr/>
+          <a:p/>
+        </p:txBody>
       </p:sp>
       <p:sp>
         <p:nvSpPr>
@@ -9747,6 +9799,10 @@
             <a:prstDash val="solid"/>
           </a:ln>
         </p:spPr>
+        <p:txBody>
+          <a:bodyPr/>
+          <a:p/>
+        </p:txBody>
       </p:sp>
       <p:sp>
         <p:nvSpPr>
@@ -9786,7 +9842,7 @@
                 <a:ea typeface="IBM Plex Sans KR" pitchFamily="34" charset="-122"/>
                 <a:cs typeface="IBM Plex Sans KR" pitchFamily="34" charset="-120"/>
               </a:rPr>
-              <a:t>2·3단계(네이버 API HUB, 검색광고 API)를 모두 등록해야 4단계 [키워드 갱신] 버튼이 눌립니다.</a:t>
+              <a:t>2·3단계(네이버 API HUB, 검색광고 API)를 모두 등록해야 4단계 [SEO 키워드 새로 고르기]의 버튼이 눌립니다.</a:t>
             </a:r>
             <a:endParaRPr lang="en-US" sz="1150" dirty="0"/>
           </a:p>
@@ -11266,6 +11322,10 @@
             <a:prstDash val="solid"/>
           </a:ln>
         </p:spPr>
+        <p:txBody>
+          <a:bodyPr/>
+          <a:p/>
+        </p:txBody>
       </p:sp>
       <p:sp>
         <p:nvSpPr>
@@ -11381,6 +11441,10 @@
             <a:prstDash val="solid"/>
           </a:ln>
         </p:spPr>
+        <p:txBody>
+          <a:bodyPr/>
+          <a:p/>
+        </p:txBody>
       </p:sp>
       <p:sp>
         <p:nvSpPr>
@@ -11496,6 +11560,10 @@
             <a:prstDash val="solid"/>
           </a:ln>
         </p:spPr>
+        <p:txBody>
+          <a:bodyPr/>
+          <a:p/>
+        </p:txBody>
       </p:sp>
       <p:sp>
         <p:nvSpPr>
@@ -11623,7 +11691,7 @@
                 <a:ea typeface="IBM Plex Sans KR" pitchFamily="34" charset="-122"/>
                 <a:cs typeface="IBM Plex Sans KR" pitchFamily="34" charset="-120"/>
               </a:rPr>
-              <a:t>두 API(HUB + 검색광고)를 모두 등록해야 다음 단계인 [키워드 갱신] 버튼이 활성화됩니다.</a:t>
+              <a:t>두 API(HUB + 검색광고)를 모두 등록해야 다음 단계인 [SEO 키워드 새로 고르기] 버튼이 활성화됩니다.</a:t>
             </a:r>
             <a:endParaRPr lang="en-US" sz="1200" dirty="0"/>
           </a:p>
@@ -11787,7 +11855,7 @@
                 <a:ea typeface="Noto Serif KR" pitchFamily="34" charset="-122"/>
                 <a:cs typeface="Noto Serif KR" pitchFamily="34" charset="-120"/>
               </a:rPr>
-              <a:t>키워드 갱신 마법사 — 1·2단계</a:t>
+              <a:t>SEO 키워드 새로 고르기 — 1·2단계</a:t>
             </a:r>
             <a:endParaRPr lang="en-US" sz="3000" dirty="0"/>
           </a:p>
@@ -11831,7 +11899,7 @@
                 <a:ea typeface="IBM Plex Sans KR" pitchFamily="34" charset="-122"/>
                 <a:cs typeface="IBM Plex Sans KR" pitchFamily="34" charset="-120"/>
               </a:rPr>
-              <a:t>⚙️ 설정 → 네이버 API 탭 → 🔑 키워드 갱신. SEO 키워드를 바꾸는 곳은 이 마법사 하나뿐입니다.</a:t>
+              <a:t>⚙️ 설정 → 네이버 API 탭 → 🔑 SEO 키워드 새로 고르기. SEO 키워드를 바꾸는 곳은 여기 하나뿐입니다.</a:t>
             </a:r>
             <a:endParaRPr lang="en-US" sz="1300" dirty="0"/>
           </a:p>
@@ -11863,6 +11931,10 @@
             <a:prstDash val="solid"/>
           </a:ln>
         </p:spPr>
+        <p:txBody>
+          <a:bodyPr/>
+          <a:p/>
+        </p:txBody>
       </p:sp>
       <p:sp>
         <p:nvSpPr>
@@ -12022,6 +12094,10 @@
             <a:prstDash val="solid"/>
           </a:ln>
         </p:spPr>
+        <p:txBody>
+          <a:bodyPr/>
+          <a:p/>
+        </p:txBody>
       </p:sp>
       <p:sp>
         <p:nvSpPr>
@@ -12181,6 +12257,10 @@
             <a:prstDash val="solid"/>
           </a:ln>
         </p:spPr>
+        <p:txBody>
+          <a:bodyPr/>
+          <a:p/>
+        </p:txBody>
       </p:sp>
       <p:sp>
         <p:nvSpPr>
@@ -12384,7 +12464,7 @@
                 <a:ea typeface="Noto Serif KR" pitchFamily="34" charset="-122"/>
                 <a:cs typeface="Noto Serif KR" pitchFamily="34" charset="-120"/>
               </a:rPr>
-              <a:t>키워드 갱신 마법사 — 3·4단계</a:t>
+              <a:t>SEO 키워드 새로 고르기 — 3·4단계</a:t>
             </a:r>
             <a:endParaRPr lang="en-US" sz="3000" dirty="0"/>
           </a:p>
@@ -12416,6 +12496,10 @@
             <a:prstDash val="solid"/>
           </a:ln>
         </p:spPr>
+        <p:txBody>
+          <a:bodyPr/>
+          <a:p/>
+        </p:txBody>
       </p:sp>
       <p:sp>
         <p:nvSpPr>
@@ -12575,6 +12659,10 @@
             <a:prstDash val="solid"/>
           </a:ln>
         </p:spPr>
+        <p:txBody>
+          <a:bodyPr/>
+          <a:p/>
+        </p:txBody>
       </p:sp>
       <p:sp>
         <p:nvSpPr>
@@ -12702,7 +12790,7 @@
                 <a:ea typeface="IBM Plex Sans KR" pitchFamily="34" charset="-122"/>
                 <a:cs typeface="IBM Plex Sans KR" pitchFamily="34" charset="-120"/>
               </a:rPr>
-              <a:t>[적용]을 누르면 그제서야 브랜드 킷의 SEO 키워드 풀이 실제로 바뀌고 측정까지 완료됩니다. 승인 전까지는 아무것도 바뀌지 않습니다.</a:t>
+              <a:t>[적용]을 누르는 순간 브랜드 킷의 SEO 키워드가 바뀌고 새 키워드 측정까지 끝납니다. 따로 할 일은 없습니다(적용 직후 숫자 재기 불필요).</a:t>
             </a:r>
             <a:endParaRPr lang="en-US" sz="1200" dirty="0"/>
           </a:p>

--- a/docs/더스티치 OSMU 사용자 매뉴얼.pptx
+++ b/docs/더스티치 OSMU 사용자 매뉴얼.pptx
@@ -16,6 +16,7 @@
     <p:sldId id="264" r:id="rId10"/>
     <p:sldId id="265" r:id="rId11"/>
     <p:sldId id="266" r:id="rId12"/>
+    <p:sldId id="271" r:id="rId22"/>
     <p:sldId id="267" r:id="rId13"/>
     <p:sldId id="268" r:id="rId14"/>
     <p:sldId id="269" r:id="rId15"/>
@@ -3504,6 +3505,10 @@
             <a:prstDash val="solid"/>
           </a:ln>
         </p:spPr>
+        <p:txBody>
+          <a:bodyPr/>
+          <a:p/>
+        </p:txBody>
       </p:sp>
       <p:sp>
         <p:nvSpPr>
@@ -3686,6 +3691,10 @@
             <a:prstDash val="solid"/>
           </a:ln>
         </p:spPr>
+        <p:txBody>
+          <a:bodyPr/>
+          <a:p/>
+        </p:txBody>
       </p:sp>
       <p:sp>
         <p:nvSpPr>
@@ -3868,6 +3877,10 @@
             <a:prstDash val="solid"/>
           </a:ln>
         </p:spPr>
+        <p:txBody>
+          <a:bodyPr/>
+          <a:p/>
+        </p:txBody>
       </p:sp>
       <p:sp>
         <p:nvSpPr>
@@ -4050,6 +4063,10 @@
             <a:prstDash val="solid"/>
           </a:ln>
         </p:spPr>
+        <p:txBody>
+          <a:bodyPr/>
+          <a:p/>
+        </p:txBody>
       </p:sp>
       <p:sp>
         <p:nvSpPr>
@@ -4232,6 +4249,10 @@
             <a:prstDash val="solid"/>
           </a:ln>
         </p:spPr>
+        <p:txBody>
+          <a:bodyPr/>
+          <a:p/>
+        </p:txBody>
       </p:sp>
       <p:sp>
         <p:nvSpPr>
@@ -4643,6 +4664,10 @@
             <a:prstDash val="solid"/>
           </a:ln>
         </p:spPr>
+        <p:txBody>
+          <a:bodyPr/>
+          <a:p/>
+        </p:txBody>
       </p:sp>
       <p:sp>
         <p:nvSpPr>
@@ -4802,6 +4827,10 @@
             <a:prstDash val="solid"/>
           </a:ln>
         </p:spPr>
+        <p:txBody>
+          <a:bodyPr/>
+          <a:p/>
+        </p:txBody>
       </p:sp>
       <p:sp>
         <p:nvSpPr>
@@ -4961,6 +4990,10 @@
             <a:prstDash val="solid"/>
           </a:ln>
         </p:spPr>
+        <p:txBody>
+          <a:bodyPr/>
+          <a:p/>
+        </p:txBody>
       </p:sp>
       <p:sp>
         <p:nvSpPr>
@@ -5044,7 +5077,7 @@
                 <a:ea typeface="IBM Plex Sans KR" pitchFamily="34" charset="-122"/>
                 <a:cs typeface="IBM Plex Sans KR" pitchFamily="34" charset="-120"/>
               </a:rPr>
-              <a:t>더스티치 OSMU 사용자 매뉴얼 · 12</a:t>
+              <a:t>더스티치 OSMU 사용자 매뉴얼 · 13</a:t>
             </a:r>
             <a:endParaRPr lang="en-US" sz="1100" dirty="0"/>
           </a:p>
@@ -5240,6 +5273,10 @@
             <a:prstDash val="solid"/>
           </a:ln>
         </p:spPr>
+        <p:txBody>
+          <a:bodyPr/>
+          <a:p/>
+        </p:txBody>
       </p:sp>
       <p:sp>
         <p:nvSpPr>
@@ -5422,6 +5459,10 @@
             <a:prstDash val="solid"/>
           </a:ln>
         </p:spPr>
+        <p:txBody>
+          <a:bodyPr/>
+          <a:p/>
+        </p:txBody>
       </p:sp>
       <p:sp>
         <p:nvSpPr>
@@ -5593,7 +5634,7 @@
                 <a:ea typeface="IBM Plex Sans KR" pitchFamily="34" charset="-122"/>
                 <a:cs typeface="IBM Plex Sans KR" pitchFamily="34" charset="-120"/>
               </a:rPr>
-              <a:t>더스티치 OSMU 사용자 매뉴얼 · 13</a:t>
+              <a:t>더스티치 OSMU 사용자 매뉴얼 · 14</a:t>
             </a:r>
             <a:endParaRPr lang="en-US" sz="1100" dirty="0"/>
           </a:p>
@@ -5745,6 +5786,10 @@
             <a:prstDash val="solid"/>
           </a:ln>
         </p:spPr>
+        <p:txBody>
+          <a:bodyPr/>
+          <a:p/>
+        </p:txBody>
       </p:sp>
       <p:pic>
         <p:nvPicPr>
@@ -5883,6 +5928,10 @@
             <a:prstDash val="solid"/>
           </a:ln>
         </p:spPr>
+        <p:txBody>
+          <a:bodyPr/>
+          <a:p/>
+        </p:txBody>
       </p:sp>
       <p:pic>
         <p:nvPicPr>
@@ -5977,6 +6026,10 @@
             <a:prstDash val="solid"/>
           </a:ln>
         </p:spPr>
+        <p:txBody>
+          <a:bodyPr/>
+          <a:p/>
+        </p:txBody>
       </p:sp>
       <p:pic>
         <p:nvPicPr>
@@ -6093,6 +6146,10 @@
             <a:prstDash val="solid"/>
           </a:ln>
         </p:spPr>
+        <p:txBody>
+          <a:bodyPr/>
+          <a:p/>
+        </p:txBody>
       </p:sp>
       <p:pic>
         <p:nvPicPr>
@@ -6209,6 +6266,10 @@
             <a:prstDash val="solid"/>
           </a:ln>
         </p:spPr>
+        <p:txBody>
+          <a:bodyPr/>
+          <a:p/>
+        </p:txBody>
       </p:sp>
       <p:pic>
         <p:nvPicPr>
@@ -6315,7 +6376,7 @@
                 <a:ea typeface="IBM Plex Sans KR" pitchFamily="34" charset="-122"/>
                 <a:cs typeface="IBM Plex Sans KR" pitchFamily="34" charset="-120"/>
               </a:rPr>
-              <a:t>더스티치 OSMU 사용자 매뉴얼 · 14</a:t>
+              <a:t>더스티치 OSMU 사용자 매뉴얼 · 15</a:t>
             </a:r>
             <a:endParaRPr lang="en-US" sz="1100" dirty="0"/>
           </a:p>
@@ -6988,6 +7049,601 @@
 </p:sld>
 </file>
 
+<file path=ppt/slides/slide16.xml><?xml version="1.0" encoding="utf-8"?>
+<p:sld xmlns:a="http://schemas.openxmlformats.org/drawingml/2006/main" xmlns:p="http://schemas.openxmlformats.org/presentationml/2006/main" xmlns:r="http://schemas.openxmlformats.org/officeDocument/2006/relationships">
+  <p:cSld>
+    <p:spTree>
+      <p:nvGrpSpPr>
+        <p:cNvPr id="1" name=""/>
+        <p:cNvGrpSpPr/>
+        <p:nvPr/>
+      </p:nvGrpSpPr>
+      <p:grpSpPr/>
+      <p:sp>
+        <p:nvSpPr>
+          <p:cNvPr id="2" name="Text 0"/>
+          <p:cNvSpPr/>
+          <p:nvPr/>
+        </p:nvSpPr>
+        <p:spPr>
+          <a:xfrm>
+            <a:off x="812800" y="812800"/>
+            <a:ext cx="10883392" cy="220960"/>
+          </a:xfrm>
+          <a:prstGeom prst="rect">
+            <a:avLst/>
+          </a:prstGeom>
+          <a:noFill/>
+          <a:ln/>
+        </p:spPr>
+        <p:txBody>
+          <a:bodyPr wrap="square" lIns="0" tIns="0" rIns="0" bIns="0" rtlCol="0" anchor="t">
+            <a:normAutofit/>
+          </a:bodyPr>
+          <a:lstStyle/>
+          <a:p>
+            <a:pPr algn="l" indent="0" marL="0">
+              <a:lnSpc>
+                <a:spcPts val="1540"/>
+              </a:lnSpc>
+              <a:buNone/>
+            </a:pPr>
+            <a:r>
+              <a:rPr lang="en-US" sz="1100" spc="100" kern="0" dirty="0">
+                <a:solidFill>
+                  <a:srgbClr val="5B7553"/>
+                </a:solidFill>
+                <a:latin typeface="IBM Plex Sans KR" pitchFamily="34" charset="0"/>
+                <a:ea typeface="IBM Plex Sans KR" pitchFamily="34" charset="-122"/>
+                <a:cs typeface="IBM Plex Sans KR" pitchFamily="34" charset="-120"/>
+              </a:rPr>
+              <a:t>07 · WORKBENCH (2/2)</a:t>
+            </a:r>
+            <a:endParaRPr lang="en-US" sz="1100" dirty="0"/>
+          </a:p>
+        </p:txBody>
+      </p:sp>
+      <p:sp>
+        <p:nvSpPr>
+          <p:cNvPr id="3" name="Text 1"/>
+          <p:cNvSpPr/>
+          <p:nvPr/>
+        </p:nvSpPr>
+        <p:spPr>
+          <a:xfrm>
+            <a:off x="812800" y="1084560"/>
+            <a:ext cx="10883392" cy="463550"/>
+          </a:xfrm>
+          <a:prstGeom prst="rect">
+            <a:avLst/>
+          </a:prstGeom>
+          <a:noFill/>
+          <a:ln/>
+        </p:spPr>
+        <p:txBody>
+          <a:bodyPr wrap="square" lIns="0" tIns="0" rIns="0" bIns="0" rtlCol="0" anchor="t">
+            <a:normAutofit/>
+          </a:bodyPr>
+          <a:lstStyle/>
+          <a:p>
+            <a:pPr algn="l" indent="0" marL="0">
+              <a:lnSpc>
+                <a:spcPts val="3450"/>
+              </a:lnSpc>
+              <a:buNone/>
+            </a:pPr>
+            <a:r>
+              <a:rPr lang="en-US" sz="3000" b="1" dirty="0">
+                <a:solidFill>
+                  <a:srgbClr val="26291F"/>
+                </a:solidFill>
+                <a:latin typeface="Noto Serif KR" pitchFamily="34" charset="0"/>
+                <a:ea typeface="Noto Serif KR" pitchFamily="34" charset="-122"/>
+                <a:cs typeface="Noto Serif KR" pitchFamily="34" charset="-120"/>
+              </a:rPr>
+              <a:t>SNS 자동 검증 &amp; 다시 만들기</a:t>
+            </a:r>
+            <a:endParaRPr lang="en-US" sz="3000" dirty="0"/>
+          </a:p>
+        </p:txBody>
+      </p:sp>
+      <p:sp>
+        <p:nvSpPr>
+          <p:cNvPr id="4" name="Text 2"/>
+          <p:cNvSpPr/>
+          <p:nvPr/>
+        </p:nvSpPr>
+        <p:spPr>
+          <a:xfrm>
+            <a:off x="812800" y="1598910"/>
+            <a:ext cx="10464800" cy="256530"/>
+          </a:xfrm>
+          <a:prstGeom prst="rect">
+            <a:avLst/>
+          </a:prstGeom>
+          <a:noFill/>
+          <a:ln/>
+        </p:spPr>
+        <p:txBody>
+          <a:bodyPr wrap="square" lIns="0" tIns="0" rIns="0" bIns="0" rtlCol="0" anchor="t">
+            <a:normAutofit/>
+          </a:bodyPr>
+          <a:lstStyle/>
+          <a:p>
+            <a:pPr algn="l" indent="0" marL="0">
+              <a:lnSpc>
+                <a:spcPts val="1820"/>
+              </a:lnSpc>
+              <a:buNone/>
+            </a:pPr>
+            <a:r>
+              <a:rPr lang="en-US" sz="1300" dirty="0">
+                <a:solidFill>
+                  <a:srgbClr val="5C6355"/>
+                </a:solidFill>
+                <a:latin typeface="IBM Plex Sans KR" pitchFamily="34" charset="0"/>
+                <a:ea typeface="IBM Plex Sans KR" pitchFamily="34" charset="-122"/>
+                <a:cs typeface="IBM Plex Sans KR" pitchFamily="34" charset="-120"/>
+              </a:rPr>
+              <a:t>초안 생성 직후 인스타·X·쇼츠·발행 태그를 자동으로 점검·정리합니다.</a:t>
+            </a:r>
+            <a:endParaRPr lang="en-US" sz="1300" dirty="0"/>
+          </a:p>
+        </p:txBody>
+      </p:sp>
+      <p:sp>
+        <p:nvSpPr>
+          <p:cNvPr id="5" name="Shape 3"/>
+          <p:cNvSpPr/>
+          <p:nvPr/>
+        </p:nvSpPr>
+        <p:spPr>
+          <a:xfrm>
+            <a:off x="815975" y="2087215"/>
+            <a:ext cx="5187950" cy="1390551"/>
+          </a:xfrm>
+          <a:prstGeom prst="roundRect">
+            <a:avLst>
+              <a:gd name="adj" fmla="val 7078"/>
+            </a:avLst>
+          </a:prstGeom>
+          <a:solidFill>
+            <a:srgbClr val="FFFDF6"/>
+          </a:solidFill>
+          <a:ln w="6350">
+            <a:solidFill>
+              <a:srgbClr val="E4DFD2"/>
+            </a:solidFill>
+            <a:prstDash val="solid"/>
+          </a:ln>
+        </p:spPr>
+        <p:txBody>
+          <a:bodyPr/>
+          <a:p/>
+        </p:txBody>
+      </p:sp>
+      <p:sp>
+        <p:nvSpPr>
+          <p:cNvPr id="6" name="Text 4"/>
+          <p:cNvSpPr/>
+          <p:nvPr/>
+        </p:nvSpPr>
+        <p:spPr>
+          <a:xfrm>
+            <a:off x="1022350" y="2293590"/>
+            <a:ext cx="4918456" cy="238720"/>
+          </a:xfrm>
+          <a:prstGeom prst="rect">
+            <a:avLst/>
+          </a:prstGeom>
+          <a:noFill/>
+          <a:ln/>
+        </p:spPr>
+        <p:txBody>
+          <a:bodyPr wrap="square" lIns="0" tIns="0" rIns="0" bIns="0" rtlCol="0" anchor="t">
+            <a:normAutofit/>
+          </a:bodyPr>
+          <a:lstStyle/>
+          <a:p>
+            <a:pPr algn="l" indent="0" marL="0">
+              <a:lnSpc>
+                <a:spcPts val="1680"/>
+              </a:lnSpc>
+              <a:buNone/>
+            </a:pPr>
+            <a:r>
+              <a:rPr lang="en-US" sz="1400" b="1" dirty="0">
+                <a:solidFill>
+                  <a:srgbClr val="26291F"/>
+                </a:solidFill>
+                <a:latin typeface="IBM Plex Sans KR" pitchFamily="34" charset="0"/>
+                <a:ea typeface="IBM Plex Sans KR" pitchFamily="34" charset="-122"/>
+                <a:cs typeface="IBM Plex Sans KR" pitchFamily="34" charset="-120"/>
+              </a:rPr>
+              <a:t>📸 인스타그램 · X</a:t>
+            </a:r>
+            <a:endParaRPr lang="en-US" sz="1400" dirty="0"/>
+          </a:p>
+        </p:txBody>
+      </p:sp>
+      <p:sp>
+        <p:nvSpPr>
+          <p:cNvPr id="7" name="Text 5"/>
+          <p:cNvSpPr/>
+          <p:nvPr/>
+        </p:nvSpPr>
+        <p:spPr>
+          <a:xfrm>
+            <a:off x="1022350" y="2595811"/>
+            <a:ext cx="4918456" cy="416520"/>
+          </a:xfrm>
+          <a:prstGeom prst="rect">
+            <a:avLst/>
+          </a:prstGeom>
+          <a:noFill/>
+          <a:ln/>
+        </p:spPr>
+        <p:txBody>
+          <a:bodyPr wrap="square" lIns="0" tIns="0" rIns="0" bIns="0" rtlCol="0" anchor="t">
+            <a:normAutofit/>
+          </a:bodyPr>
+          <a:lstStyle/>
+          <a:p>
+            <a:pPr algn="l" indent="0" marL="0">
+              <a:lnSpc>
+                <a:spcPts val="1540"/>
+              </a:lnSpc>
+              <a:buNone/>
+            </a:pPr>
+            <a:r>
+              <a:rPr lang="en-US" sz="1100" dirty="0">
+                <a:solidFill>
+                  <a:srgbClr val="5C6355"/>
+                </a:solidFill>
+                <a:latin typeface="IBM Plex Sans KR" pitchFamily="34" charset="0"/>
+                <a:ea typeface="IBM Plex Sans KR" pitchFamily="34" charset="-122"/>
+                <a:cs typeface="IBM Plex Sans KR" pitchFamily="34" charset="-120"/>
+              </a:rPr>
+              <a:t>'더보기' 전 범위(앞 125자·2줄) 초과 시 경고, 해시태그 자동 보정. X는 한글 1자=2로 세어 280자에서 자동 분할.</a:t>
+            </a:r>
+            <a:endParaRPr lang="en-US" sz="1100" dirty="0"/>
+          </a:p>
+        </p:txBody>
+      </p:sp>
+      <p:sp>
+        <p:nvSpPr>
+          <p:cNvPr id="8" name="Text 6"/>
+          <p:cNvSpPr/>
+          <p:nvPr/>
+        </p:nvSpPr>
+        <p:spPr>
+          <a:xfrm>
+            <a:off x="1022350" y="3075831"/>
+            <a:ext cx="4918456" cy="220960"/>
+          </a:xfrm>
+          <a:prstGeom prst="rect">
+            <a:avLst/>
+          </a:prstGeom>
+          <a:noFill/>
+          <a:ln/>
+        </p:spPr>
+        <p:txBody>
+          <a:bodyPr wrap="square" lIns="0" tIns="0" rIns="0" bIns="0" rtlCol="0" anchor="t">
+            <a:normAutofit/>
+          </a:bodyPr>
+          <a:lstStyle/>
+          <a:p>
+            <a:pPr algn="l" indent="0" marL="0">
+              <a:lnSpc>
+                <a:spcPts val="1540"/>
+              </a:lnSpc>
+              <a:buNone/>
+            </a:pPr>
+            <a:r>
+              <a:rPr lang="en-US" sz="1100" b="1" dirty="0">
+                <a:solidFill>
+                  <a:srgbClr val="5B7553"/>
+                </a:solidFill>
+                <a:latin typeface="IBM Plex Sans KR" pitchFamily="34" charset="0"/>
+                <a:ea typeface="IBM Plex Sans KR" pitchFamily="34" charset="-122"/>
+                <a:cs typeface="IBM Plex Sans KR" pitchFamily="34" charset="-120"/>
+              </a:rPr>
+              <a:t>📏 실제 게시 기준과 동일</a:t>
+            </a:r>
+            <a:endParaRPr lang="en-US" sz="1100" dirty="0"/>
+          </a:p>
+        </p:txBody>
+      </p:sp>
+      <p:sp>
+        <p:nvSpPr>
+          <p:cNvPr id="9" name="Shape 7"/>
+          <p:cNvSpPr/>
+          <p:nvPr/>
+        </p:nvSpPr>
+        <p:spPr>
+          <a:xfrm>
+            <a:off x="6188075" y="2087215"/>
+            <a:ext cx="5187950" cy="1390551"/>
+          </a:xfrm>
+          <a:prstGeom prst="roundRect">
+            <a:avLst>
+              <a:gd name="adj" fmla="val 7078"/>
+            </a:avLst>
+          </a:prstGeom>
+          <a:solidFill>
+            <a:srgbClr val="FFFDF6"/>
+          </a:solidFill>
+          <a:ln w="6350">
+            <a:solidFill>
+              <a:srgbClr val="E4DFD2"/>
+            </a:solidFill>
+            <a:prstDash val="solid"/>
+          </a:ln>
+        </p:spPr>
+        <p:txBody>
+          <a:bodyPr/>
+          <a:p/>
+        </p:txBody>
+      </p:sp>
+      <p:sp>
+        <p:nvSpPr>
+          <p:cNvPr id="10" name="Text 8"/>
+          <p:cNvSpPr/>
+          <p:nvPr/>
+        </p:nvSpPr>
+        <p:spPr>
+          <a:xfrm>
+            <a:off x="6394450" y="2293590"/>
+            <a:ext cx="4918456" cy="238720"/>
+          </a:xfrm>
+          <a:prstGeom prst="rect">
+            <a:avLst/>
+          </a:prstGeom>
+          <a:noFill/>
+          <a:ln/>
+        </p:spPr>
+        <p:txBody>
+          <a:bodyPr wrap="square" lIns="0" tIns="0" rIns="0" bIns="0" rtlCol="0" anchor="t">
+            <a:normAutofit/>
+          </a:bodyPr>
+          <a:lstStyle/>
+          <a:p>
+            <a:pPr algn="l" indent="0" marL="0">
+              <a:lnSpc>
+                <a:spcPts val="1680"/>
+              </a:lnSpc>
+              <a:buNone/>
+            </a:pPr>
+            <a:r>
+              <a:rPr lang="en-US" sz="1400" b="1" dirty="0">
+                <a:solidFill>
+                  <a:srgbClr val="26291F"/>
+                </a:solidFill>
+                <a:latin typeface="IBM Plex Sans KR" pitchFamily="34" charset="0"/>
+                <a:ea typeface="IBM Plex Sans KR" pitchFamily="34" charset="-122"/>
+                <a:cs typeface="IBM Plex Sans KR" pitchFamily="34" charset="-120"/>
+              </a:rPr>
+              <a:t>🎬 쇼츠 · 발행 태그</a:t>
+            </a:r>
+            <a:endParaRPr lang="en-US" sz="1400" dirty="0"/>
+          </a:p>
+        </p:txBody>
+      </p:sp>
+      <p:sp>
+        <p:nvSpPr>
+          <p:cNvPr id="11" name="Text 9"/>
+          <p:cNvSpPr/>
+          <p:nvPr/>
+        </p:nvSpPr>
+        <p:spPr>
+          <a:xfrm>
+            <a:off x="6394450" y="2595811"/>
+            <a:ext cx="4918456" cy="220960"/>
+          </a:xfrm>
+          <a:prstGeom prst="rect">
+            <a:avLst/>
+          </a:prstGeom>
+          <a:noFill/>
+          <a:ln/>
+        </p:spPr>
+        <p:txBody>
+          <a:bodyPr wrap="square" lIns="0" tIns="0" rIns="0" bIns="0" rtlCol="0" anchor="t">
+            <a:normAutofit/>
+          </a:bodyPr>
+          <a:lstStyle/>
+          <a:p>
+            <a:pPr algn="l" indent="0" marL="0">
+              <a:lnSpc>
+                <a:spcPts val="1540"/>
+              </a:lnSpc>
+              <a:buNone/>
+            </a:pPr>
+            <a:r>
+              <a:rPr lang="en-US" sz="1100" dirty="0">
+                <a:solidFill>
+                  <a:srgbClr val="5C6355"/>
+                </a:solidFill>
+                <a:latin typeface="IBM Plex Sans KR" pitchFamily="34" charset="0"/>
+                <a:ea typeface="IBM Plex Sans KR" pitchFamily="34" charset="-122"/>
+                <a:cs typeface="IBM Plex Sans KR" pitchFamily="34" charset="-120"/>
+              </a:rPr>
+              <a:t>컷 자막 20자 초과 시 경고, 제목에는 #shorts를 자동으로 붙입니다.</a:t>
+            </a:r>
+            <a:endParaRPr lang="en-US" sz="1100" dirty="0"/>
+          </a:p>
+        </p:txBody>
+      </p:sp>
+      <p:sp>
+        <p:nvSpPr>
+          <p:cNvPr id="12" name="Text 10"/>
+          <p:cNvSpPr/>
+          <p:nvPr/>
+        </p:nvSpPr>
+        <p:spPr>
+          <a:xfrm>
+            <a:off x="6394450" y="2880271"/>
+            <a:ext cx="4918456" cy="220960"/>
+          </a:xfrm>
+          <a:prstGeom prst="rect">
+            <a:avLst/>
+          </a:prstGeom>
+          <a:noFill/>
+          <a:ln/>
+        </p:spPr>
+        <p:txBody>
+          <a:bodyPr wrap="square" lIns="0" tIns="0" rIns="0" bIns="0" rtlCol="0" anchor="t">
+            <a:normAutofit/>
+          </a:bodyPr>
+          <a:lstStyle/>
+          <a:p>
+            <a:pPr algn="l" indent="0" marL="0">
+              <a:lnSpc>
+                <a:spcPts val="1540"/>
+              </a:lnSpc>
+              <a:buNone/>
+            </a:pPr>
+            <a:r>
+              <a:rPr lang="en-US" sz="1100" b="1" dirty="0">
+                <a:solidFill>
+                  <a:srgbClr val="5B7553"/>
+                </a:solidFill>
+                <a:latin typeface="IBM Plex Sans KR" pitchFamily="34" charset="0"/>
+                <a:ea typeface="IBM Plex Sans KR" pitchFamily="34" charset="-122"/>
+                <a:cs typeface="IBM Plex Sans KR" pitchFamily="34" charset="-120"/>
+              </a:rPr>
+              <a:t>발행 태그 7~12개로 정리, 부족하면 타깃 키워드로 채웁니다.</a:t>
+            </a:r>
+            <a:endParaRPr lang="en-US" sz="1100" dirty="0"/>
+          </a:p>
+        </p:txBody>
+      </p:sp>
+      <p:sp>
+        <p:nvSpPr>
+          <p:cNvPr id="13" name="Shape 11"/>
+          <p:cNvSpPr/>
+          <p:nvPr/>
+        </p:nvSpPr>
+        <p:spPr>
+          <a:xfrm>
+            <a:off x="815975" y="3738116"/>
+            <a:ext cx="10560050" cy="515590"/>
+          </a:xfrm>
+          <a:prstGeom prst="roundRect">
+            <a:avLst>
+              <a:gd name="adj" fmla="val 14163"/>
+            </a:avLst>
+          </a:prstGeom>
+          <a:solidFill>
+            <a:srgbClr val="E7EEE1"/>
+          </a:solidFill>
+          <a:ln w="6350">
+            <a:solidFill>
+              <a:srgbClr val="C9D8BE"/>
+            </a:solidFill>
+            <a:prstDash val="solid"/>
+          </a:ln>
+        </p:spPr>
+        <p:txBody>
+          <a:bodyPr/>
+          <a:p/>
+        </p:txBody>
+      </p:sp>
+      <p:sp>
+        <p:nvSpPr>
+          <p:cNvPr id="14" name="Text 12"/>
+          <p:cNvSpPr/>
+          <p:nvPr/>
+        </p:nvSpPr>
+        <p:spPr>
+          <a:xfrm>
+            <a:off x="1022350" y="3893691"/>
+            <a:ext cx="10451719" cy="229840"/>
+          </a:xfrm>
+          <a:prstGeom prst="rect">
+            <a:avLst/>
+          </a:prstGeom>
+          <a:noFill/>
+          <a:ln/>
+        </p:spPr>
+        <p:txBody>
+          <a:bodyPr wrap="square" lIns="0" tIns="0" rIns="0" bIns="0" rtlCol="0" anchor="t">
+            <a:normAutofit/>
+          </a:bodyPr>
+          <a:lstStyle/>
+          <a:p>
+            <a:pPr algn="l" indent="0" marL="0">
+              <a:lnSpc>
+                <a:spcPts val="1610"/>
+              </a:lnSpc>
+              <a:buNone/>
+            </a:pPr>
+            <a:r>
+              <a:rPr lang="en-US" sz="1150" dirty="0">
+                <a:solidFill>
+                  <a:srgbClr val="3E5136"/>
+                </a:solidFill>
+                <a:latin typeface="IBM Plex Sans KR" pitchFamily="34" charset="0"/>
+                <a:ea typeface="IBM Plex Sans KR" pitchFamily="34" charset="-122"/>
+                <a:cs typeface="IBM Plex Sans KR" pitchFamily="34" charset="-120"/>
+              </a:rPr>
+              <a:t>본문을 고치면 SNS 3채널은 '수정 전 본문 기준'으로 표시됩니다 — 🛡️ 리포트의 [📣 SNS 3채널 다시 만들기]로 최신 내용에 맞춰 다시 만드세요.</a:t>
+            </a:r>
+            <a:endParaRPr lang="en-US" sz="1150" dirty="0"/>
+          </a:p>
+        </p:txBody>
+      </p:sp>
+      <p:sp>
+        <p:nvSpPr>
+          <p:cNvPr id="15" name="Text 13"/>
+          <p:cNvSpPr/>
+          <p:nvPr/>
+        </p:nvSpPr>
+        <p:spPr>
+          <a:xfrm>
+            <a:off x="812800" y="6256040"/>
+            <a:ext cx="2072776" cy="220960"/>
+          </a:xfrm>
+          <a:prstGeom prst="rect">
+            <a:avLst/>
+          </a:prstGeom>
+          <a:noFill/>
+          <a:ln/>
+        </p:spPr>
+        <p:txBody>
+          <a:bodyPr wrap="square" lIns="0" tIns="0" rIns="0" bIns="0" rtlCol="0" anchor="t">
+            <a:normAutofit/>
+          </a:bodyPr>
+          <a:lstStyle/>
+          <a:p>
+            <a:pPr algn="l" indent="0" marL="0">
+              <a:lnSpc>
+                <a:spcPts val="1540"/>
+              </a:lnSpc>
+              <a:buNone/>
+            </a:pPr>
+            <a:r>
+              <a:rPr lang="en-US" sz="1100" dirty="0">
+                <a:solidFill>
+                  <a:srgbClr val="8A9080"/>
+                </a:solidFill>
+                <a:latin typeface="IBM Plex Sans KR" pitchFamily="34" charset="0"/>
+                <a:ea typeface="IBM Plex Sans KR" pitchFamily="34" charset="-122"/>
+                <a:cs typeface="IBM Plex Sans KR" pitchFamily="34" charset="-120"/>
+              </a:rPr>
+              <a:t>더스티치 OSMU 사용자 매뉴얼 · 12</a:t>
+            </a:r>
+            <a:endParaRPr lang="en-US" sz="1100" dirty="0"/>
+          </a:p>
+        </p:txBody>
+      </p:sp>
+    </p:spTree>
+  </p:cSld>
+  <p:clrMapOvr>
+    <a:masterClrMapping/>
+  </p:clrMapOvr>
+</p:sld>
+</file>
+
 <file path=ppt/slides/slide2.xml><?xml version="1.0" encoding="utf-8"?>
 <p:sld xmlns:a="http://schemas.openxmlformats.org/drawingml/2006/main" xmlns:r="http://schemas.openxmlformats.org/officeDocument/2006/relationships" xmlns:p="http://schemas.openxmlformats.org/presentationml/2006/main">
   <p:cSld name="Slide 2">
@@ -8214,6 +8870,10 @@
             <a:prstDash val="solid"/>
           </a:ln>
         </p:spPr>
+        <p:txBody>
+          <a:bodyPr/>
+          <a:p/>
+        </p:txBody>
       </p:sp>
       <p:sp>
         <p:nvSpPr>
@@ -8329,6 +8989,10 @@
             <a:prstDash val="solid"/>
           </a:ln>
         </p:spPr>
+        <p:txBody>
+          <a:bodyPr/>
+          <a:p/>
+        </p:txBody>
       </p:sp>
       <p:sp>
         <p:nvSpPr>
@@ -8444,6 +9108,10 @@
             <a:prstDash val="solid"/>
           </a:ln>
         </p:spPr>
+        <p:txBody>
+          <a:bodyPr/>
+          <a:p/>
+        </p:txBody>
       </p:sp>
       <p:sp>
         <p:nvSpPr>
@@ -8559,6 +9227,10 @@
             <a:prstDash val="solid"/>
           </a:ln>
         </p:spPr>
+        <p:txBody>
+          <a:bodyPr/>
+          <a:p/>
+        </p:txBody>
       </p:sp>
       <p:sp>
         <p:nvSpPr>
@@ -8674,6 +9346,10 @@
             <a:prstDash val="solid"/>
           </a:ln>
         </p:spPr>
+        <p:txBody>
+          <a:bodyPr/>
+          <a:p/>
+        </p:txBody>
       </p:sp>
       <p:sp>
         <p:nvSpPr>
@@ -8789,6 +9465,10 @@
             <a:prstDash val="solid"/>
           </a:ln>
         </p:spPr>
+        <p:txBody>
+          <a:bodyPr/>
+          <a:p/>
+        </p:txBody>
       </p:sp>
       <p:sp>
         <p:nvSpPr>
@@ -10082,6 +10762,10 @@
             <a:prstDash val="solid"/>
           </a:ln>
         </p:spPr>
+        <p:txBody>
+          <a:bodyPr/>
+          <a:p/>
+        </p:txBody>
       </p:sp>
       <p:sp>
         <p:nvSpPr>
@@ -10220,6 +10904,10 @@
             <a:prstDash val="solid"/>
           </a:ln>
         </p:spPr>
+        <p:txBody>
+          <a:bodyPr/>
+          <a:p/>
+        </p:txBody>
       </p:sp>
       <p:sp>
         <p:nvSpPr>
@@ -10358,6 +11046,10 @@
             <a:prstDash val="solid"/>
           </a:ln>
         </p:spPr>
+        <p:txBody>
+          <a:bodyPr/>
+          <a:p/>
+        </p:txBody>
       </p:sp>
       <p:sp>
         <p:nvSpPr>
@@ -10725,6 +11417,10 @@
             <a:prstDash val="solid"/>
           </a:ln>
         </p:spPr>
+        <p:txBody>
+          <a:bodyPr/>
+          <a:p/>
+        </p:txBody>
       </p:sp>
       <p:sp>
         <p:nvSpPr>
@@ -10840,6 +11536,10 @@
             <a:prstDash val="solid"/>
           </a:ln>
         </p:spPr>
+        <p:txBody>
+          <a:bodyPr/>
+          <a:p/>
+        </p:txBody>
       </p:sp>
       <p:sp>
         <p:nvSpPr>
@@ -10955,6 +11655,10 @@
             <a:prstDash val="solid"/>
           </a:ln>
         </p:spPr>
+        <p:txBody>
+          <a:bodyPr/>
+          <a:p/>
+        </p:txBody>
       </p:sp>
       <p:sp>
         <p:nvSpPr>
